--- a/images/4/No.4-1.pptx
+++ b/images/4/No.4-1.pptx
@@ -1313,7 +1313,7 @@
               </a:lnSpc>
             </a:pPr>
             <a:r>
-              <a:rPr i="0" spc="-525" dirty="0">
+              <a:rPr sz="16200" i="0" spc="-525" dirty="0">
                 <a:latin typeface="Lobster Regular" charset="0"/>
                 <a:cs typeface="Lobster Regular" charset="0"/>
               </a:rPr>
